--- a/mattree.pptx
+++ b/mattree.pptx
@@ -6,6 +6,7 @@
   </p:sldMasterIdLst>
   <p:sldIdLst>
     <p:sldId id="257" r:id="rId2"/>
+    <p:sldId id="258" r:id="rId3"/>
   </p:sldIdLst>
   <p:sldSz cx="12192000" cy="6858000"/>
   <p:notesSz cx="6858000" cy="9144000"/>
@@ -104,6 +105,11 @@
       </a:defRPr>
     </a:lvl9pPr>
   </p:defaultTextStyle>
+  <p:extLst>
+    <p:ext uri="{EFAFB233-063F-42B5-8137-9DF3F51BA10A}">
+      <p15:sldGuideLst xmlns:p15="http://schemas.microsoft.com/office/powerpoint/2012/main"/>
+    </p:ext>
+  </p:extLst>
 </p:presentation>
 </file>
 
@@ -256,7 +262,7 @@
           <a:p>
             <a:fld id="{4CE271B3-5476-614F-9A76-D1E0E5C896C8}" type="datetimeFigureOut">
               <a:rPr lang="en-US" smtClean="0"/>
-              <a:t>6/21/26</a:t>
+              <a:t>6/23/26</a:t>
             </a:fld>
             <a:endParaRPr lang="en-US"/>
           </a:p>
@@ -456,7 +462,7 @@
           <a:p>
             <a:fld id="{4CE271B3-5476-614F-9A76-D1E0E5C896C8}" type="datetimeFigureOut">
               <a:rPr lang="en-US" smtClean="0"/>
-              <a:t>6/21/26</a:t>
+              <a:t>6/23/26</a:t>
             </a:fld>
             <a:endParaRPr lang="en-US"/>
           </a:p>
@@ -666,7 +672,7 @@
           <a:p>
             <a:fld id="{4CE271B3-5476-614F-9A76-D1E0E5C896C8}" type="datetimeFigureOut">
               <a:rPr lang="en-US" smtClean="0"/>
-              <a:t>6/21/26</a:t>
+              <a:t>6/23/26</a:t>
             </a:fld>
             <a:endParaRPr lang="en-US"/>
           </a:p>
@@ -866,7 +872,7 @@
           <a:p>
             <a:fld id="{4CE271B3-5476-614F-9A76-D1E0E5C896C8}" type="datetimeFigureOut">
               <a:rPr lang="en-US" smtClean="0"/>
-              <a:t>6/21/26</a:t>
+              <a:t>6/23/26</a:t>
             </a:fld>
             <a:endParaRPr lang="en-US"/>
           </a:p>
@@ -1142,7 +1148,7 @@
           <a:p>
             <a:fld id="{4CE271B3-5476-614F-9A76-D1E0E5C896C8}" type="datetimeFigureOut">
               <a:rPr lang="en-US" smtClean="0"/>
-              <a:t>6/21/26</a:t>
+              <a:t>6/23/26</a:t>
             </a:fld>
             <a:endParaRPr lang="en-US"/>
           </a:p>
@@ -1410,7 +1416,7 @@
           <a:p>
             <a:fld id="{4CE271B3-5476-614F-9A76-D1E0E5C896C8}" type="datetimeFigureOut">
               <a:rPr lang="en-US" smtClean="0"/>
-              <a:t>6/21/26</a:t>
+              <a:t>6/23/26</a:t>
             </a:fld>
             <a:endParaRPr lang="en-US"/>
           </a:p>
@@ -1825,7 +1831,7 @@
           <a:p>
             <a:fld id="{4CE271B3-5476-614F-9A76-D1E0E5C896C8}" type="datetimeFigureOut">
               <a:rPr lang="en-US" smtClean="0"/>
-              <a:t>6/21/26</a:t>
+              <a:t>6/23/26</a:t>
             </a:fld>
             <a:endParaRPr lang="en-US"/>
           </a:p>
@@ -1967,7 +1973,7 @@
           <a:p>
             <a:fld id="{4CE271B3-5476-614F-9A76-D1E0E5C896C8}" type="datetimeFigureOut">
               <a:rPr lang="en-US" smtClean="0"/>
-              <a:t>6/21/26</a:t>
+              <a:t>6/23/26</a:t>
             </a:fld>
             <a:endParaRPr lang="en-US"/>
           </a:p>
@@ -2080,7 +2086,7 @@
           <a:p>
             <a:fld id="{4CE271B3-5476-614F-9A76-D1E0E5C896C8}" type="datetimeFigureOut">
               <a:rPr lang="en-US" smtClean="0"/>
-              <a:t>6/21/26</a:t>
+              <a:t>6/23/26</a:t>
             </a:fld>
             <a:endParaRPr lang="en-US"/>
           </a:p>
@@ -2393,7 +2399,7 @@
           <a:p>
             <a:fld id="{4CE271B3-5476-614F-9A76-D1E0E5C896C8}" type="datetimeFigureOut">
               <a:rPr lang="en-US" smtClean="0"/>
-              <a:t>6/21/26</a:t>
+              <a:t>6/23/26</a:t>
             </a:fld>
             <a:endParaRPr lang="en-US"/>
           </a:p>
@@ -2682,7 +2688,7 @@
           <a:p>
             <a:fld id="{4CE271B3-5476-614F-9A76-D1E0E5C896C8}" type="datetimeFigureOut">
               <a:rPr lang="en-US" smtClean="0"/>
-              <a:t>6/21/26</a:t>
+              <a:t>6/23/26</a:t>
             </a:fld>
             <a:endParaRPr lang="en-US"/>
           </a:p>
@@ -2925,7 +2931,7 @@
           <a:p>
             <a:fld id="{4CE271B3-5476-614F-9A76-D1E0E5C896C8}" type="datetimeFigureOut">
               <a:rPr lang="en-US" smtClean="0"/>
-              <a:t>6/21/26</a:t>
+              <a:t>6/23/26</a:t>
             </a:fld>
             <a:endParaRPr lang="en-US"/>
           </a:p>
@@ -4853,6 +4859,1534 @@
 </p:sld>
 </file>
 
+<file path=ppt/slides/slide2.xml><?xml version="1.0" encoding="utf-8"?>
+<p:sld xmlns:a="http://schemas.openxmlformats.org/drawingml/2006/main" xmlns:r="http://schemas.openxmlformats.org/officeDocument/2006/relationships" xmlns:p="http://schemas.openxmlformats.org/presentationml/2006/main">
+  <p:cSld>
+    <p:spTree>
+      <p:nvGrpSpPr>
+        <p:cNvPr id="1" name=""/>
+        <p:cNvGrpSpPr/>
+        <p:nvPr/>
+      </p:nvGrpSpPr>
+      <p:grpSpPr>
+        <a:xfrm>
+          <a:off x="0" y="0"/>
+          <a:ext cx="0" cy="0"/>
+          <a:chOff x="0" y="0"/>
+          <a:chExt cx="0" cy="0"/>
+        </a:xfrm>
+      </p:grpSpPr>
+      <p:sp>
+        <p:nvSpPr>
+          <p:cNvPr id="3" name="Rectangle 2">
+            <a:extLst>
+              <a:ext uri="{FF2B5EF4-FFF2-40B4-BE49-F238E27FC236}">
+                <a16:creationId xmlns:a16="http://schemas.microsoft.com/office/drawing/2014/main" id="{E98BB6DF-F729-9F0F-2316-5C9845B9006D}"/>
+              </a:ext>
+            </a:extLst>
+          </p:cNvPr>
+          <p:cNvSpPr/>
+          <p:nvPr/>
+        </p:nvSpPr>
+        <p:spPr>
+          <a:xfrm>
+            <a:off x="4836000" y="1555532"/>
+            <a:ext cx="2520000" cy="720000"/>
+          </a:xfrm>
+          <a:prstGeom prst="rect">
+            <a:avLst/>
+          </a:prstGeom>
+          <a:solidFill>
+            <a:srgbClr val="201F8F"/>
+          </a:solidFill>
+          <a:ln>
+            <a:noFill/>
+          </a:ln>
+        </p:spPr>
+        <p:style>
+          <a:lnRef idx="2">
+            <a:schemeClr val="accent1">
+              <a:shade val="50000"/>
+            </a:schemeClr>
+          </a:lnRef>
+          <a:fillRef idx="1">
+            <a:schemeClr val="accent1"/>
+          </a:fillRef>
+          <a:effectRef idx="0">
+            <a:schemeClr val="accent1"/>
+          </a:effectRef>
+          <a:fontRef idx="minor">
+            <a:schemeClr val="lt1"/>
+          </a:fontRef>
+        </p:style>
+        <p:txBody>
+          <a:bodyPr rtlCol="0" anchor="ctr"/>
+          <a:lstStyle/>
+          <a:p>
+            <a:pPr algn="ctr"/>
+            <a:r>
+              <a:rPr lang="en-US" dirty="0"/>
+              <a:t>ZAI23FERT01</a:t>
+            </a:r>
+          </a:p>
+        </p:txBody>
+      </p:sp>
+      <p:sp>
+        <p:nvSpPr>
+          <p:cNvPr id="4" name="Rectangle 3">
+            <a:extLst>
+              <a:ext uri="{FF2B5EF4-FFF2-40B4-BE49-F238E27FC236}">
+                <a16:creationId xmlns:a16="http://schemas.microsoft.com/office/drawing/2014/main" id="{601AE965-13A3-A05B-4E3E-289E4835E24B}"/>
+              </a:ext>
+            </a:extLst>
+          </p:cNvPr>
+          <p:cNvSpPr/>
+          <p:nvPr/>
+        </p:nvSpPr>
+        <p:spPr>
+          <a:xfrm>
+            <a:off x="3337033" y="3069000"/>
+            <a:ext cx="2520000" cy="720000"/>
+          </a:xfrm>
+          <a:prstGeom prst="rect">
+            <a:avLst/>
+          </a:prstGeom>
+          <a:solidFill>
+            <a:srgbClr val="0779CC"/>
+          </a:solidFill>
+          <a:ln>
+            <a:noFill/>
+          </a:ln>
+        </p:spPr>
+        <p:style>
+          <a:lnRef idx="2">
+            <a:schemeClr val="accent1">
+              <a:shade val="50000"/>
+            </a:schemeClr>
+          </a:lnRef>
+          <a:fillRef idx="1">
+            <a:schemeClr val="accent1"/>
+          </a:fillRef>
+          <a:effectRef idx="0">
+            <a:schemeClr val="accent1"/>
+          </a:effectRef>
+          <a:fontRef idx="minor">
+            <a:schemeClr val="lt1"/>
+          </a:fontRef>
+        </p:style>
+        <p:txBody>
+          <a:bodyPr rtlCol="0" anchor="ctr"/>
+          <a:lstStyle/>
+          <a:p>
+            <a:pPr algn="ctr"/>
+            <a:r>
+              <a:rPr lang="en-US" dirty="0"/>
+              <a:t>ZAI23HALB01</a:t>
+            </a:r>
+          </a:p>
+        </p:txBody>
+      </p:sp>
+      <p:sp>
+        <p:nvSpPr>
+          <p:cNvPr id="5" name="Rectangle 4">
+            <a:extLst>
+              <a:ext uri="{FF2B5EF4-FFF2-40B4-BE49-F238E27FC236}">
+                <a16:creationId xmlns:a16="http://schemas.microsoft.com/office/drawing/2014/main" id="{75DB4AEE-084D-2659-41FB-94306C148820}"/>
+              </a:ext>
+            </a:extLst>
+          </p:cNvPr>
+          <p:cNvSpPr/>
+          <p:nvPr/>
+        </p:nvSpPr>
+        <p:spPr>
+          <a:xfrm>
+            <a:off x="6334968" y="3069000"/>
+            <a:ext cx="2520000" cy="720000"/>
+          </a:xfrm>
+          <a:prstGeom prst="rect">
+            <a:avLst/>
+          </a:prstGeom>
+          <a:solidFill>
+            <a:srgbClr val="04BDFE"/>
+          </a:solidFill>
+          <a:ln>
+            <a:noFill/>
+          </a:ln>
+        </p:spPr>
+        <p:style>
+          <a:lnRef idx="2">
+            <a:schemeClr val="accent1">
+              <a:shade val="50000"/>
+            </a:schemeClr>
+          </a:lnRef>
+          <a:fillRef idx="1">
+            <a:schemeClr val="accent1"/>
+          </a:fillRef>
+          <a:effectRef idx="0">
+            <a:schemeClr val="accent1"/>
+          </a:effectRef>
+          <a:fontRef idx="minor">
+            <a:schemeClr val="lt1"/>
+          </a:fontRef>
+        </p:style>
+        <p:txBody>
+          <a:bodyPr rtlCol="0" anchor="ctr"/>
+          <a:lstStyle/>
+          <a:p>
+            <a:pPr algn="ctr"/>
+            <a:r>
+              <a:rPr lang="en-US" dirty="0"/>
+              <a:t>ZAI23ROH01 (</a:t>
+            </a:r>
+            <a:r>
+              <a:rPr lang="ko-KR" altLang="en-US" dirty="0" err="1"/>
+              <a:t>舊</a:t>
+            </a:r>
+            <a:r>
+              <a:rPr lang="en-US" altLang="ko-KR" dirty="0"/>
+              <a:t>HALB02)</a:t>
+            </a:r>
+            <a:endParaRPr lang="en-US" dirty="0"/>
+          </a:p>
+        </p:txBody>
+      </p:sp>
+      <p:sp>
+        <p:nvSpPr>
+          <p:cNvPr id="6" name="Rectangle 5">
+            <a:extLst>
+              <a:ext uri="{FF2B5EF4-FFF2-40B4-BE49-F238E27FC236}">
+                <a16:creationId xmlns:a16="http://schemas.microsoft.com/office/drawing/2014/main" id="{1E96F87F-A90C-5553-DAC5-18AA0C886305}"/>
+              </a:ext>
+            </a:extLst>
+          </p:cNvPr>
+          <p:cNvSpPr/>
+          <p:nvPr/>
+        </p:nvSpPr>
+        <p:spPr>
+          <a:xfrm>
+            <a:off x="3337033" y="4582468"/>
+            <a:ext cx="2520000" cy="720000"/>
+          </a:xfrm>
+          <a:prstGeom prst="rect">
+            <a:avLst/>
+          </a:prstGeom>
+          <a:solidFill>
+            <a:srgbClr val="04BDFE"/>
+          </a:solidFill>
+          <a:ln>
+            <a:noFill/>
+          </a:ln>
+        </p:spPr>
+        <p:style>
+          <a:lnRef idx="2">
+            <a:schemeClr val="accent1">
+              <a:shade val="50000"/>
+            </a:schemeClr>
+          </a:lnRef>
+          <a:fillRef idx="1">
+            <a:schemeClr val="accent1"/>
+          </a:fillRef>
+          <a:effectRef idx="0">
+            <a:schemeClr val="accent1"/>
+          </a:effectRef>
+          <a:fontRef idx="minor">
+            <a:schemeClr val="lt1"/>
+          </a:fontRef>
+        </p:style>
+        <p:txBody>
+          <a:bodyPr rtlCol="0" anchor="ctr"/>
+          <a:lstStyle/>
+          <a:p>
+            <a:pPr algn="ctr"/>
+            <a:r>
+              <a:rPr lang="en-US" dirty="0"/>
+              <a:t>ZAI23ROH02</a:t>
+            </a:r>
+          </a:p>
+        </p:txBody>
+      </p:sp>
+      <p:grpSp>
+        <p:nvGrpSpPr>
+          <p:cNvPr id="7" name="그룹 35">
+            <a:extLst>
+              <a:ext uri="{FF2B5EF4-FFF2-40B4-BE49-F238E27FC236}">
+                <a16:creationId xmlns:a16="http://schemas.microsoft.com/office/drawing/2014/main" id="{D3698411-3CD4-1A38-7E67-FBD469CC812D}"/>
+              </a:ext>
+            </a:extLst>
+          </p:cNvPr>
+          <p:cNvGrpSpPr/>
+          <p:nvPr/>
+        </p:nvGrpSpPr>
+        <p:grpSpPr>
+          <a:xfrm>
+            <a:off x="10191910" y="128968"/>
+            <a:ext cx="1910244" cy="1939132"/>
+            <a:chOff x="10191910" y="3688122"/>
+            <a:chExt cx="1910244" cy="1939132"/>
+          </a:xfrm>
+        </p:grpSpPr>
+        <p:sp>
+          <p:nvSpPr>
+            <p:cNvPr id="8" name="Rectangle 182">
+              <a:extLst>
+                <a:ext uri="{FF2B5EF4-FFF2-40B4-BE49-F238E27FC236}">
+                  <a16:creationId xmlns:a16="http://schemas.microsoft.com/office/drawing/2014/main" id="{A4443584-E302-AA1D-8963-5B9BF6F4846F}"/>
+                </a:ext>
+              </a:extLst>
+            </p:cNvPr>
+            <p:cNvSpPr>
+              <a:spLocks noChangeArrowheads="1"/>
+            </p:cNvSpPr>
+            <p:nvPr/>
+          </p:nvSpPr>
+          <p:spPr bwMode="auto">
+            <a:xfrm>
+              <a:off x="10191910" y="4190499"/>
+              <a:ext cx="1872000" cy="432000"/>
+            </a:xfrm>
+            <a:prstGeom prst="rect">
+              <a:avLst/>
+            </a:prstGeom>
+            <a:gradFill rotWithShape="1">
+              <a:gsLst>
+                <a:gs pos="0">
+                  <a:srgbClr val="333399">
+                    <a:shade val="51000"/>
+                    <a:satMod val="130000"/>
+                  </a:srgbClr>
+                </a:gs>
+                <a:gs pos="80000">
+                  <a:srgbClr val="333399">
+                    <a:shade val="93000"/>
+                    <a:satMod val="130000"/>
+                  </a:srgbClr>
+                </a:gs>
+                <a:gs pos="100000">
+                  <a:srgbClr val="333399">
+                    <a:shade val="94000"/>
+                    <a:satMod val="135000"/>
+                  </a:srgbClr>
+                </a:gs>
+              </a:gsLst>
+              <a:lin ang="16200000" scaled="0"/>
+            </a:gradFill>
+            <a:ln>
+              <a:noFill/>
+            </a:ln>
+            <a:effectLst>
+              <a:outerShdw blurRad="40000" dist="23000" dir="5400000" rotWithShape="0">
+                <a:srgbClr val="000000">
+                  <a:alpha val="35000"/>
+                </a:srgbClr>
+              </a:outerShdw>
+            </a:effectLst>
+            <a:scene3d>
+              <a:camera prst="orthographicFront">
+                <a:rot lat="0" lon="0" rev="0"/>
+              </a:camera>
+              <a:lightRig rig="threePt" dir="t">
+                <a:rot lat="0" lon="0" rev="1200000"/>
+              </a:lightRig>
+            </a:scene3d>
+            <a:sp3d>
+              <a:bevelT w="63500" h="25400"/>
+            </a:sp3d>
+          </p:spPr>
+          <p:txBody>
+            <a:bodyPr lIns="90488" tIns="44450" rIns="90488" bIns="44450" anchor="ctr"/>
+            <a:lstStyle>
+              <a:lvl1pPr algn="l" defTabSz="762000">
+                <a:defRPr kumimoji="1" sz="2400">
+                  <a:solidFill>
+                    <a:schemeClr val="tx1"/>
+                  </a:solidFill>
+                  <a:latin typeface="Times New Roman" panose="02020603050405020304" pitchFamily="18" charset="0"/>
+                  <a:ea typeface="굴림" panose="020B0600000101010101" pitchFamily="50" charset="-127"/>
+                </a:defRPr>
+              </a:lvl1pPr>
+              <a:lvl2pPr marL="766763" algn="l" defTabSz="762000">
+                <a:defRPr kumimoji="1" sz="2400">
+                  <a:solidFill>
+                    <a:schemeClr val="tx1"/>
+                  </a:solidFill>
+                  <a:latin typeface="Times New Roman" panose="02020603050405020304" pitchFamily="18" charset="0"/>
+                  <a:ea typeface="굴림" panose="020B0600000101010101" pitchFamily="50" charset="-127"/>
+                </a:defRPr>
+              </a:lvl2pPr>
+              <a:lvl3pPr marL="1143000" algn="l" defTabSz="762000">
+                <a:defRPr kumimoji="1" sz="2400">
+                  <a:solidFill>
+                    <a:schemeClr val="tx1"/>
+                  </a:solidFill>
+                  <a:latin typeface="Times New Roman" panose="02020603050405020304" pitchFamily="18" charset="0"/>
+                  <a:ea typeface="굴림" panose="020B0600000101010101" pitchFamily="50" charset="-127"/>
+                </a:defRPr>
+              </a:lvl3pPr>
+              <a:lvl4pPr marL="1714500" algn="l" defTabSz="762000">
+                <a:defRPr kumimoji="1" sz="2400">
+                  <a:solidFill>
+                    <a:schemeClr val="tx1"/>
+                  </a:solidFill>
+                  <a:latin typeface="Times New Roman" panose="02020603050405020304" pitchFamily="18" charset="0"/>
+                  <a:ea typeface="굴림" panose="020B0600000101010101" pitchFamily="50" charset="-127"/>
+                </a:defRPr>
+              </a:lvl4pPr>
+              <a:lvl5pPr marL="2286000" algn="l" defTabSz="762000">
+                <a:defRPr kumimoji="1" sz="2400">
+                  <a:solidFill>
+                    <a:schemeClr val="tx1"/>
+                  </a:solidFill>
+                  <a:latin typeface="Times New Roman" panose="02020603050405020304" pitchFamily="18" charset="0"/>
+                  <a:ea typeface="굴림" panose="020B0600000101010101" pitchFamily="50" charset="-127"/>
+                </a:defRPr>
+              </a:lvl5pPr>
+              <a:lvl6pPr marL="2743200" defTabSz="762000" fontAlgn="base">
+                <a:spcBef>
+                  <a:spcPct val="0"/>
+                </a:spcBef>
+                <a:spcAft>
+                  <a:spcPct val="0"/>
+                </a:spcAft>
+                <a:defRPr kumimoji="1" sz="2400">
+                  <a:solidFill>
+                    <a:schemeClr val="tx1"/>
+                  </a:solidFill>
+                  <a:latin typeface="Times New Roman" panose="02020603050405020304" pitchFamily="18" charset="0"/>
+                  <a:ea typeface="굴림" panose="020B0600000101010101" pitchFamily="50" charset="-127"/>
+                </a:defRPr>
+              </a:lvl6pPr>
+              <a:lvl7pPr marL="3200400" defTabSz="762000" fontAlgn="base">
+                <a:spcBef>
+                  <a:spcPct val="0"/>
+                </a:spcBef>
+                <a:spcAft>
+                  <a:spcPct val="0"/>
+                </a:spcAft>
+                <a:defRPr kumimoji="1" sz="2400">
+                  <a:solidFill>
+                    <a:schemeClr val="tx1"/>
+                  </a:solidFill>
+                  <a:latin typeface="Times New Roman" panose="02020603050405020304" pitchFamily="18" charset="0"/>
+                  <a:ea typeface="굴림" panose="020B0600000101010101" pitchFamily="50" charset="-127"/>
+                </a:defRPr>
+              </a:lvl7pPr>
+              <a:lvl8pPr marL="3657600" defTabSz="762000" fontAlgn="base">
+                <a:spcBef>
+                  <a:spcPct val="0"/>
+                </a:spcBef>
+                <a:spcAft>
+                  <a:spcPct val="0"/>
+                </a:spcAft>
+                <a:defRPr kumimoji="1" sz="2400">
+                  <a:solidFill>
+                    <a:schemeClr val="tx1"/>
+                  </a:solidFill>
+                  <a:latin typeface="Times New Roman" panose="02020603050405020304" pitchFamily="18" charset="0"/>
+                  <a:ea typeface="굴림" panose="020B0600000101010101" pitchFamily="50" charset="-127"/>
+                </a:defRPr>
+              </a:lvl8pPr>
+              <a:lvl9pPr marL="4114800" defTabSz="762000" fontAlgn="base">
+                <a:spcBef>
+                  <a:spcPct val="0"/>
+                </a:spcBef>
+                <a:spcAft>
+                  <a:spcPct val="0"/>
+                </a:spcAft>
+                <a:defRPr kumimoji="1" sz="2400">
+                  <a:solidFill>
+                    <a:schemeClr val="tx1"/>
+                  </a:solidFill>
+                  <a:latin typeface="Times New Roman" panose="02020603050405020304" pitchFamily="18" charset="0"/>
+                  <a:ea typeface="굴림" panose="020B0600000101010101" pitchFamily="50" charset="-127"/>
+                </a:defRPr>
+              </a:lvl9pPr>
+            </a:lstStyle>
+            <a:p>
+              <a:pPr marL="0" marR="0" lvl="0" indent="0" algn="ctr" defTabSz="762000" eaLnBrk="1" fontAlgn="base" latinLnBrk="0" hangingPunct="1">
+                <a:lnSpc>
+                  <a:spcPct val="100000"/>
+                </a:lnSpc>
+                <a:spcBef>
+                  <a:spcPts val="0"/>
+                </a:spcBef>
+                <a:spcAft>
+                  <a:spcPct val="0"/>
+                </a:spcAft>
+                <a:buClrTx/>
+                <a:buSzTx/>
+                <a:buFontTx/>
+                <a:buNone/>
+                <a:tabLst/>
+                <a:defRPr/>
+              </a:pPr>
+              <a:r>
+                <a:rPr kumimoji="1" lang="ko-KR" altLang="en-US" sz="1400" b="0" i="0" u="none" strike="noStrike" kern="0" cap="none" spc="0" normalizeH="0" baseline="0" noProof="0" dirty="0">
+                  <a:ln>
+                    <a:noFill/>
+                  </a:ln>
+                  <a:solidFill>
+                    <a:srgbClr val="FFFFFF"/>
+                  </a:solidFill>
+                  <a:effectLst/>
+                  <a:uLnTx/>
+                  <a:uFillTx/>
+                  <a:latin typeface="에이투지체 6 SemiBold" pitchFamily="50" charset="-127"/>
+                  <a:ea typeface="에이투지체 6 SemiBold" pitchFamily="50" charset="-127"/>
+                  <a:cs typeface="+mn-cs"/>
+                </a:rPr>
+                <a:t>완제품 </a:t>
+              </a:r>
+              <a:r>
+                <a:rPr kumimoji="1" lang="en-US" altLang="ko-KR" sz="1400" b="0" i="0" u="none" strike="noStrike" kern="0" cap="none" spc="0" normalizeH="0" baseline="30000" noProof="0" dirty="0">
+                  <a:ln>
+                    <a:noFill/>
+                  </a:ln>
+                  <a:solidFill>
+                    <a:srgbClr val="FFFFFF"/>
+                  </a:solidFill>
+                  <a:effectLst/>
+                  <a:uLnTx/>
+                  <a:uFillTx/>
+                  <a:latin typeface="에이투지체 6 SemiBold" pitchFamily="50" charset="-127"/>
+                  <a:ea typeface="에이투지체 6 SemiBold" pitchFamily="50" charset="-127"/>
+                  <a:cs typeface="+mn-cs"/>
+                </a:rPr>
+                <a:t>Finished Goods</a:t>
+              </a:r>
+              <a:br>
+                <a:rPr kumimoji="1" lang="en-US" altLang="ko-KR" sz="1400" b="0" i="0" u="none" strike="noStrike" kern="0" cap="none" spc="0" normalizeH="0" baseline="30000" noProof="0" dirty="0">
+                  <a:ln>
+                    <a:noFill/>
+                  </a:ln>
+                  <a:solidFill>
+                    <a:srgbClr val="FFFFFF"/>
+                  </a:solidFill>
+                  <a:effectLst/>
+                  <a:uLnTx/>
+                  <a:uFillTx/>
+                  <a:latin typeface="에이투지체 6 SemiBold" pitchFamily="50" charset="-127"/>
+                  <a:ea typeface="에이투지체 6 SemiBold" pitchFamily="50" charset="-127"/>
+                  <a:cs typeface="+mn-cs"/>
+                </a:rPr>
+              </a:br>
+              <a:r>
+                <a:rPr kumimoji="1" lang="en-US" altLang="ko-KR" sz="1400" b="0" i="0" u="none" strike="noStrike" kern="0" cap="none" spc="0" normalizeH="0" baseline="0" noProof="0" dirty="0">
+                  <a:ln>
+                    <a:noFill/>
+                  </a:ln>
+                  <a:solidFill>
+                    <a:srgbClr val="FFFFFF"/>
+                  </a:solidFill>
+                  <a:effectLst/>
+                  <a:uLnTx/>
+                  <a:uFillTx/>
+                  <a:latin typeface="에이투지체 6 SemiBold" pitchFamily="50" charset="-127"/>
+                  <a:ea typeface="에이투지체 6 SemiBold" pitchFamily="50" charset="-127"/>
+                  <a:cs typeface="+mn-cs"/>
+                </a:rPr>
+                <a:t>FERT</a:t>
+              </a:r>
+            </a:p>
+          </p:txBody>
+        </p:sp>
+        <p:sp>
+          <p:nvSpPr>
+            <p:cNvPr id="9" name="Rectangle 182">
+              <a:extLst>
+                <a:ext uri="{FF2B5EF4-FFF2-40B4-BE49-F238E27FC236}">
+                  <a16:creationId xmlns:a16="http://schemas.microsoft.com/office/drawing/2014/main" id="{6B7457D3-EF06-46D3-E5ED-96393D0CA4E9}"/>
+                </a:ext>
+              </a:extLst>
+            </p:cNvPr>
+            <p:cNvSpPr>
+              <a:spLocks noChangeArrowheads="1"/>
+            </p:cNvSpPr>
+            <p:nvPr/>
+          </p:nvSpPr>
+          <p:spPr bwMode="auto">
+            <a:xfrm>
+              <a:off x="10211032" y="4692876"/>
+              <a:ext cx="1872000" cy="432000"/>
+            </a:xfrm>
+            <a:prstGeom prst="rect">
+              <a:avLst/>
+            </a:prstGeom>
+            <a:solidFill>
+              <a:srgbClr val="0070C0"/>
+            </a:solidFill>
+            <a:ln>
+              <a:noFill/>
+            </a:ln>
+            <a:effectLst>
+              <a:outerShdw blurRad="40000" dist="23000" dir="5400000" rotWithShape="0">
+                <a:srgbClr val="000000">
+                  <a:alpha val="35000"/>
+                </a:srgbClr>
+              </a:outerShdw>
+            </a:effectLst>
+            <a:scene3d>
+              <a:camera prst="orthographicFront">
+                <a:rot lat="0" lon="0" rev="0"/>
+              </a:camera>
+              <a:lightRig rig="threePt" dir="t">
+                <a:rot lat="0" lon="0" rev="1200000"/>
+              </a:lightRig>
+            </a:scene3d>
+            <a:sp3d>
+              <a:bevelT w="63500" h="25400"/>
+            </a:sp3d>
+          </p:spPr>
+          <p:txBody>
+            <a:bodyPr lIns="90488" tIns="44450" rIns="90488" bIns="44450" anchor="ctr"/>
+            <a:lstStyle/>
+            <a:p>
+              <a:pPr marL="0" marR="0" lvl="0" indent="0" algn="ctr" defTabSz="762000" eaLnBrk="1" fontAlgn="base" latinLnBrk="0" hangingPunct="1">
+                <a:lnSpc>
+                  <a:spcPct val="100000"/>
+                </a:lnSpc>
+                <a:spcBef>
+                  <a:spcPts val="0"/>
+                </a:spcBef>
+                <a:spcAft>
+                  <a:spcPct val="0"/>
+                </a:spcAft>
+                <a:buClrTx/>
+                <a:buSzTx/>
+                <a:buFontTx/>
+                <a:buNone/>
+                <a:tabLst/>
+                <a:defRPr/>
+              </a:pPr>
+              <a:r>
+                <a:rPr kumimoji="1" lang="ko-KR" altLang="en-US" sz="1400" b="0" i="0" u="none" strike="noStrike" kern="0" cap="none" spc="0" normalizeH="0" baseline="0" noProof="0" dirty="0">
+                  <a:ln>
+                    <a:noFill/>
+                  </a:ln>
+                  <a:solidFill>
+                    <a:srgbClr val="FFFFFF"/>
+                  </a:solidFill>
+                  <a:effectLst/>
+                  <a:uLnTx/>
+                  <a:uFillTx/>
+                  <a:latin typeface="에이투지체 6 SemiBold" pitchFamily="50" charset="-127"/>
+                  <a:ea typeface="에이투지체 6 SemiBold" pitchFamily="50" charset="-127"/>
+                  <a:cs typeface="+mn-cs"/>
+                </a:rPr>
+                <a:t>반제품 </a:t>
+              </a:r>
+              <a:r>
+                <a:rPr kumimoji="1" lang="en-US" altLang="ko-KR" sz="1400" b="0" i="0" u="none" strike="noStrike" kern="0" cap="none" spc="0" normalizeH="0" baseline="30000" noProof="0" dirty="0">
+                  <a:ln>
+                    <a:noFill/>
+                  </a:ln>
+                  <a:solidFill>
+                    <a:srgbClr val="FFFFFF"/>
+                  </a:solidFill>
+                  <a:effectLst/>
+                  <a:uLnTx/>
+                  <a:uFillTx/>
+                  <a:latin typeface="에이투지체 6 SemiBold" pitchFamily="50" charset="-127"/>
+                  <a:ea typeface="에이투지체 6 SemiBold" pitchFamily="50" charset="-127"/>
+                  <a:cs typeface="+mn-cs"/>
+                </a:rPr>
+                <a:t>Semi-Finished Goods</a:t>
+              </a:r>
+              <a:r>
+                <a:rPr kumimoji="1" lang="ko-KR" altLang="en-US" sz="1400" b="0" i="0" u="none" strike="noStrike" kern="0" cap="none" spc="0" normalizeH="0" baseline="0" noProof="0" dirty="0">
+                  <a:ln>
+                    <a:noFill/>
+                  </a:ln>
+                  <a:solidFill>
+                    <a:srgbClr val="FFFFFF"/>
+                  </a:solidFill>
+                  <a:effectLst/>
+                  <a:uLnTx/>
+                  <a:uFillTx/>
+                  <a:latin typeface="에이투지체 6 SemiBold" pitchFamily="50" charset="-127"/>
+                  <a:ea typeface="에이투지체 6 SemiBold" pitchFamily="50" charset="-127"/>
+                  <a:cs typeface="+mn-cs"/>
+                </a:rPr>
+                <a:t> </a:t>
+              </a:r>
+              <a:r>
+                <a:rPr kumimoji="1" lang="en-US" altLang="ko-KR" sz="1400" b="0" i="0" u="none" strike="noStrike" kern="0" cap="none" spc="0" normalizeH="0" baseline="0" noProof="0" dirty="0">
+                  <a:ln>
+                    <a:noFill/>
+                  </a:ln>
+                  <a:solidFill>
+                    <a:srgbClr val="FFFFFF"/>
+                  </a:solidFill>
+                  <a:effectLst/>
+                  <a:uLnTx/>
+                  <a:uFillTx/>
+                  <a:latin typeface="에이투지체 6 SemiBold" pitchFamily="50" charset="-127"/>
+                  <a:ea typeface="에이투지체 6 SemiBold" pitchFamily="50" charset="-127"/>
+                  <a:cs typeface="+mn-cs"/>
+                </a:rPr>
+                <a:t>HALB</a:t>
+              </a:r>
+            </a:p>
+          </p:txBody>
+        </p:sp>
+        <p:sp>
+          <p:nvSpPr>
+            <p:cNvPr id="10" name="Rectangle 182">
+              <a:extLst>
+                <a:ext uri="{FF2B5EF4-FFF2-40B4-BE49-F238E27FC236}">
+                  <a16:creationId xmlns:a16="http://schemas.microsoft.com/office/drawing/2014/main" id="{4566DF31-DEB9-500D-3526-5D0A992B34F4}"/>
+                </a:ext>
+              </a:extLst>
+            </p:cNvPr>
+            <p:cNvSpPr>
+              <a:spLocks noChangeArrowheads="1"/>
+            </p:cNvSpPr>
+            <p:nvPr/>
+          </p:nvSpPr>
+          <p:spPr bwMode="auto">
+            <a:xfrm>
+              <a:off x="10230154" y="5195254"/>
+              <a:ext cx="1872000" cy="432000"/>
+            </a:xfrm>
+            <a:prstGeom prst="rect">
+              <a:avLst/>
+            </a:prstGeom>
+            <a:solidFill>
+              <a:srgbClr val="00B0F0"/>
+            </a:solidFill>
+            <a:ln>
+              <a:noFill/>
+            </a:ln>
+            <a:effectLst>
+              <a:outerShdw blurRad="40000" dist="23000" dir="5400000" rotWithShape="0">
+                <a:srgbClr val="000000">
+                  <a:alpha val="35000"/>
+                </a:srgbClr>
+              </a:outerShdw>
+            </a:effectLst>
+            <a:scene3d>
+              <a:camera prst="orthographicFront">
+                <a:rot lat="0" lon="0" rev="0"/>
+              </a:camera>
+              <a:lightRig rig="threePt" dir="t">
+                <a:rot lat="0" lon="0" rev="1200000"/>
+              </a:lightRig>
+            </a:scene3d>
+            <a:sp3d>
+              <a:bevelT w="63500" h="25400"/>
+            </a:sp3d>
+          </p:spPr>
+          <p:txBody>
+            <a:bodyPr lIns="90488" tIns="44450" rIns="90488" bIns="44450" anchor="ctr"/>
+            <a:lstStyle/>
+            <a:p>
+              <a:pPr marL="0" marR="0" lvl="0" indent="0" algn="ctr" defTabSz="762000" eaLnBrk="1" fontAlgn="base" latinLnBrk="0" hangingPunct="1">
+                <a:lnSpc>
+                  <a:spcPct val="100000"/>
+                </a:lnSpc>
+                <a:spcBef>
+                  <a:spcPts val="0"/>
+                </a:spcBef>
+                <a:spcAft>
+                  <a:spcPct val="0"/>
+                </a:spcAft>
+                <a:buClrTx/>
+                <a:buSzTx/>
+                <a:buFontTx/>
+                <a:buNone/>
+                <a:tabLst/>
+                <a:defRPr/>
+              </a:pPr>
+              <a:r>
+                <a:rPr kumimoji="1" lang="ko-KR" altLang="en-US" sz="1400" b="0" i="0" u="none" strike="noStrike" kern="0" cap="none" spc="0" normalizeH="0" baseline="0" noProof="0" dirty="0">
+                  <a:ln>
+                    <a:noFill/>
+                  </a:ln>
+                  <a:solidFill>
+                    <a:srgbClr val="FFFFFF"/>
+                  </a:solidFill>
+                  <a:effectLst/>
+                  <a:uLnTx/>
+                  <a:uFillTx/>
+                  <a:latin typeface="에이투지체 6 SemiBold" pitchFamily="50" charset="-127"/>
+                  <a:ea typeface="에이투지체 6 SemiBold" pitchFamily="50" charset="-127"/>
+                  <a:cs typeface="+mn-cs"/>
+                </a:rPr>
+                <a:t>원자재  </a:t>
+              </a:r>
+              <a:r>
+                <a:rPr kumimoji="1" lang="en-US" altLang="ko-KR" sz="1400" b="0" i="0" u="none" strike="noStrike" kern="0" cap="none" spc="0" normalizeH="0" baseline="30000" noProof="0" dirty="0">
+                  <a:ln>
+                    <a:noFill/>
+                  </a:ln>
+                  <a:solidFill>
+                    <a:srgbClr val="FFFFFF"/>
+                  </a:solidFill>
+                  <a:effectLst/>
+                  <a:uLnTx/>
+                  <a:uFillTx/>
+                  <a:latin typeface="에이투지체 6 SemiBold" pitchFamily="50" charset="-127"/>
+                  <a:ea typeface="에이투지체 6 SemiBold" pitchFamily="50" charset="-127"/>
+                  <a:cs typeface="+mn-cs"/>
+                </a:rPr>
+                <a:t>Raw Material</a:t>
+              </a:r>
+              <a:r>
+                <a:rPr kumimoji="1" lang="ko-KR" altLang="en-US" sz="1400" b="0" i="0" u="none" strike="noStrike" kern="0" cap="none" spc="0" normalizeH="0" baseline="0" noProof="0" dirty="0">
+                  <a:ln>
+                    <a:noFill/>
+                  </a:ln>
+                  <a:solidFill>
+                    <a:srgbClr val="FFFFFF"/>
+                  </a:solidFill>
+                  <a:effectLst/>
+                  <a:uLnTx/>
+                  <a:uFillTx/>
+                  <a:latin typeface="에이투지체 6 SemiBold" pitchFamily="50" charset="-127"/>
+                  <a:ea typeface="에이투지체 6 SemiBold" pitchFamily="50" charset="-127"/>
+                  <a:cs typeface="+mn-cs"/>
+                </a:rPr>
+                <a:t> </a:t>
+              </a:r>
+              <a:br>
+                <a:rPr kumimoji="1" lang="en-US" altLang="ko-KR" sz="1400" b="0" i="0" u="none" strike="noStrike" kern="0" cap="none" spc="0" normalizeH="0" baseline="0" noProof="0" dirty="0">
+                  <a:ln>
+                    <a:noFill/>
+                  </a:ln>
+                  <a:solidFill>
+                    <a:srgbClr val="FFFFFF"/>
+                  </a:solidFill>
+                  <a:effectLst/>
+                  <a:uLnTx/>
+                  <a:uFillTx/>
+                  <a:latin typeface="에이투지체 6 SemiBold" pitchFamily="50" charset="-127"/>
+                  <a:ea typeface="에이투지체 6 SemiBold" pitchFamily="50" charset="-127"/>
+                  <a:cs typeface="+mn-cs"/>
+                </a:rPr>
+              </a:br>
+              <a:r>
+                <a:rPr kumimoji="1" lang="en-US" altLang="ko-KR" sz="1400" b="0" i="0" u="none" strike="noStrike" kern="0" cap="none" spc="0" normalizeH="0" baseline="0" noProof="0" dirty="0">
+                  <a:ln>
+                    <a:noFill/>
+                  </a:ln>
+                  <a:solidFill>
+                    <a:srgbClr val="FFFFFF"/>
+                  </a:solidFill>
+                  <a:effectLst/>
+                  <a:uLnTx/>
+                  <a:uFillTx/>
+                  <a:latin typeface="에이투지체 6 SemiBold" pitchFamily="50" charset="-127"/>
+                  <a:ea typeface="에이투지체 6 SemiBold" pitchFamily="50" charset="-127"/>
+                  <a:cs typeface="+mn-cs"/>
+                </a:rPr>
+                <a:t>ROH</a:t>
+              </a:r>
+            </a:p>
+          </p:txBody>
+        </p:sp>
+        <p:sp>
+          <p:nvSpPr>
+            <p:cNvPr id="11" name="Rectangle 182">
+              <a:extLst>
+                <a:ext uri="{FF2B5EF4-FFF2-40B4-BE49-F238E27FC236}">
+                  <a16:creationId xmlns:a16="http://schemas.microsoft.com/office/drawing/2014/main" id="{D3FE09D1-7130-F687-84E8-0E388329F3A6}"/>
+                </a:ext>
+              </a:extLst>
+            </p:cNvPr>
+            <p:cNvSpPr>
+              <a:spLocks noChangeArrowheads="1"/>
+            </p:cNvSpPr>
+            <p:nvPr/>
+          </p:nvSpPr>
+          <p:spPr bwMode="auto">
+            <a:xfrm>
+              <a:off x="10191910" y="3688122"/>
+              <a:ext cx="1872000" cy="432000"/>
+            </a:xfrm>
+            <a:prstGeom prst="rect">
+              <a:avLst/>
+            </a:prstGeom>
+            <a:solidFill>
+              <a:srgbClr val="7030A0"/>
+            </a:solidFill>
+            <a:ln>
+              <a:noFill/>
+            </a:ln>
+            <a:effectLst>
+              <a:outerShdw blurRad="40000" dist="23000" dir="5400000" rotWithShape="0">
+                <a:srgbClr val="000000">
+                  <a:alpha val="35000"/>
+                </a:srgbClr>
+              </a:outerShdw>
+            </a:effectLst>
+            <a:scene3d>
+              <a:camera prst="orthographicFront">
+                <a:rot lat="0" lon="0" rev="0"/>
+              </a:camera>
+              <a:lightRig rig="threePt" dir="t">
+                <a:rot lat="0" lon="0" rev="1200000"/>
+              </a:lightRig>
+            </a:scene3d>
+            <a:sp3d>
+              <a:bevelT w="63500" h="25400"/>
+            </a:sp3d>
+          </p:spPr>
+          <p:txBody>
+            <a:bodyPr lIns="36000" tIns="36000" rIns="36000" bIns="36000" anchor="ctr"/>
+            <a:lstStyle>
+              <a:lvl1pPr algn="l" defTabSz="762000">
+                <a:defRPr kumimoji="1" sz="2400">
+                  <a:solidFill>
+                    <a:schemeClr val="tx1"/>
+                  </a:solidFill>
+                  <a:latin typeface="Times New Roman" panose="02020603050405020304" pitchFamily="18" charset="0"/>
+                  <a:ea typeface="굴림" panose="020B0600000101010101" pitchFamily="50" charset="-127"/>
+                </a:defRPr>
+              </a:lvl1pPr>
+              <a:lvl2pPr marL="766763" algn="l" defTabSz="762000">
+                <a:defRPr kumimoji="1" sz="2400">
+                  <a:solidFill>
+                    <a:schemeClr val="tx1"/>
+                  </a:solidFill>
+                  <a:latin typeface="Times New Roman" panose="02020603050405020304" pitchFamily="18" charset="0"/>
+                  <a:ea typeface="굴림" panose="020B0600000101010101" pitchFamily="50" charset="-127"/>
+                </a:defRPr>
+              </a:lvl2pPr>
+              <a:lvl3pPr marL="1143000" algn="l" defTabSz="762000">
+                <a:defRPr kumimoji="1" sz="2400">
+                  <a:solidFill>
+                    <a:schemeClr val="tx1"/>
+                  </a:solidFill>
+                  <a:latin typeface="Times New Roman" panose="02020603050405020304" pitchFamily="18" charset="0"/>
+                  <a:ea typeface="굴림" panose="020B0600000101010101" pitchFamily="50" charset="-127"/>
+                </a:defRPr>
+              </a:lvl3pPr>
+              <a:lvl4pPr marL="1714500" algn="l" defTabSz="762000">
+                <a:defRPr kumimoji="1" sz="2400">
+                  <a:solidFill>
+                    <a:schemeClr val="tx1"/>
+                  </a:solidFill>
+                  <a:latin typeface="Times New Roman" panose="02020603050405020304" pitchFamily="18" charset="0"/>
+                  <a:ea typeface="굴림" panose="020B0600000101010101" pitchFamily="50" charset="-127"/>
+                </a:defRPr>
+              </a:lvl4pPr>
+              <a:lvl5pPr marL="2286000" algn="l" defTabSz="762000">
+                <a:defRPr kumimoji="1" sz="2400">
+                  <a:solidFill>
+                    <a:schemeClr val="tx1"/>
+                  </a:solidFill>
+                  <a:latin typeface="Times New Roman" panose="02020603050405020304" pitchFamily="18" charset="0"/>
+                  <a:ea typeface="굴림" panose="020B0600000101010101" pitchFamily="50" charset="-127"/>
+                </a:defRPr>
+              </a:lvl5pPr>
+              <a:lvl6pPr marL="2743200" defTabSz="762000" fontAlgn="base">
+                <a:spcBef>
+                  <a:spcPct val="0"/>
+                </a:spcBef>
+                <a:spcAft>
+                  <a:spcPct val="0"/>
+                </a:spcAft>
+                <a:defRPr kumimoji="1" sz="2400">
+                  <a:solidFill>
+                    <a:schemeClr val="tx1"/>
+                  </a:solidFill>
+                  <a:latin typeface="Times New Roman" panose="02020603050405020304" pitchFamily="18" charset="0"/>
+                  <a:ea typeface="굴림" panose="020B0600000101010101" pitchFamily="50" charset="-127"/>
+                </a:defRPr>
+              </a:lvl6pPr>
+              <a:lvl7pPr marL="3200400" defTabSz="762000" fontAlgn="base">
+                <a:spcBef>
+                  <a:spcPct val="0"/>
+                </a:spcBef>
+                <a:spcAft>
+                  <a:spcPct val="0"/>
+                </a:spcAft>
+                <a:defRPr kumimoji="1" sz="2400">
+                  <a:solidFill>
+                    <a:schemeClr val="tx1"/>
+                  </a:solidFill>
+                  <a:latin typeface="Times New Roman" panose="02020603050405020304" pitchFamily="18" charset="0"/>
+                  <a:ea typeface="굴림" panose="020B0600000101010101" pitchFamily="50" charset="-127"/>
+                </a:defRPr>
+              </a:lvl7pPr>
+              <a:lvl8pPr marL="3657600" defTabSz="762000" fontAlgn="base">
+                <a:spcBef>
+                  <a:spcPct val="0"/>
+                </a:spcBef>
+                <a:spcAft>
+                  <a:spcPct val="0"/>
+                </a:spcAft>
+                <a:defRPr kumimoji="1" sz="2400">
+                  <a:solidFill>
+                    <a:schemeClr val="tx1"/>
+                  </a:solidFill>
+                  <a:latin typeface="Times New Roman" panose="02020603050405020304" pitchFamily="18" charset="0"/>
+                  <a:ea typeface="굴림" panose="020B0600000101010101" pitchFamily="50" charset="-127"/>
+                </a:defRPr>
+              </a:lvl8pPr>
+              <a:lvl9pPr marL="4114800" defTabSz="762000" fontAlgn="base">
+                <a:spcBef>
+                  <a:spcPct val="0"/>
+                </a:spcBef>
+                <a:spcAft>
+                  <a:spcPct val="0"/>
+                </a:spcAft>
+                <a:defRPr kumimoji="1" sz="2400">
+                  <a:solidFill>
+                    <a:schemeClr val="tx1"/>
+                  </a:solidFill>
+                  <a:latin typeface="Times New Roman" panose="02020603050405020304" pitchFamily="18" charset="0"/>
+                  <a:ea typeface="굴림" panose="020B0600000101010101" pitchFamily="50" charset="-127"/>
+                </a:defRPr>
+              </a:lvl9pPr>
+            </a:lstStyle>
+            <a:p>
+              <a:pPr algn="ctr" fontAlgn="base">
+                <a:lnSpc>
+                  <a:spcPct val="80000"/>
+                </a:lnSpc>
+                <a:spcAft>
+                  <a:spcPct val="0"/>
+                </a:spcAft>
+              </a:pPr>
+              <a:r>
+                <a:rPr lang="en-US" altLang="ko-KR" sz="1400" kern="0" dirty="0">
+                  <a:solidFill>
+                    <a:srgbClr val="FFFFFF"/>
+                  </a:solidFill>
+                  <a:latin typeface="에이투지체 6 SemiBold" pitchFamily="50" charset="-127"/>
+                  <a:ea typeface="에이투지체 6 SemiBold" pitchFamily="50" charset="-127"/>
+                </a:rPr>
+                <a:t>Business Partner</a:t>
+              </a:r>
+            </a:p>
+          </p:txBody>
+        </p:sp>
+      </p:grpSp>
+      <p:sp>
+        <p:nvSpPr>
+          <p:cNvPr id="12" name="Rectangle 11">
+            <a:extLst>
+              <a:ext uri="{FF2B5EF4-FFF2-40B4-BE49-F238E27FC236}">
+                <a16:creationId xmlns:a16="http://schemas.microsoft.com/office/drawing/2014/main" id="{DD3F38B3-2C9A-7CE8-0903-C62BBC6FB214}"/>
+              </a:ext>
+            </a:extLst>
+          </p:cNvPr>
+          <p:cNvSpPr/>
+          <p:nvPr/>
+        </p:nvSpPr>
+        <p:spPr>
+          <a:xfrm>
+            <a:off x="3337033" y="3825734"/>
+            <a:ext cx="2520000" cy="360000"/>
+          </a:xfrm>
+          <a:prstGeom prst="rect">
+            <a:avLst/>
+          </a:prstGeom>
+          <a:noFill/>
+          <a:ln>
+            <a:solidFill>
+              <a:schemeClr val="tx1"/>
+            </a:solidFill>
+          </a:ln>
+        </p:spPr>
+        <p:style>
+          <a:lnRef idx="2">
+            <a:schemeClr val="accent1">
+              <a:shade val="50000"/>
+            </a:schemeClr>
+          </a:lnRef>
+          <a:fillRef idx="1">
+            <a:schemeClr val="accent1"/>
+          </a:fillRef>
+          <a:effectRef idx="0">
+            <a:schemeClr val="accent1"/>
+          </a:effectRef>
+          <a:fontRef idx="minor">
+            <a:schemeClr val="lt1"/>
+          </a:fontRef>
+        </p:style>
+        <p:txBody>
+          <a:bodyPr rtlCol="0" anchor="ctr"/>
+          <a:lstStyle/>
+          <a:p>
+            <a:pPr algn="ctr"/>
+            <a:r>
+              <a:rPr lang="en-US" dirty="0">
+                <a:solidFill>
+                  <a:schemeClr val="tx1"/>
+                </a:solidFill>
+              </a:rPr>
+              <a:t>EDUAI23|SEM30,PD,PP</a:t>
+            </a:r>
+          </a:p>
+        </p:txBody>
+      </p:sp>
+      <p:sp>
+        <p:nvSpPr>
+          <p:cNvPr id="14" name="Rectangle 13">
+            <a:extLst>
+              <a:ext uri="{FF2B5EF4-FFF2-40B4-BE49-F238E27FC236}">
+                <a16:creationId xmlns:a16="http://schemas.microsoft.com/office/drawing/2014/main" id="{B57518AC-10C5-615E-73E3-168B9212D7D6}"/>
+              </a:ext>
+            </a:extLst>
+          </p:cNvPr>
+          <p:cNvSpPr/>
+          <p:nvPr/>
+        </p:nvSpPr>
+        <p:spPr>
+          <a:xfrm>
+            <a:off x="4836000" y="2312266"/>
+            <a:ext cx="2520000" cy="360000"/>
+          </a:xfrm>
+          <a:prstGeom prst="rect">
+            <a:avLst/>
+          </a:prstGeom>
+          <a:noFill/>
+          <a:ln>
+            <a:solidFill>
+              <a:schemeClr val="tx1"/>
+            </a:solidFill>
+          </a:ln>
+        </p:spPr>
+        <p:style>
+          <a:lnRef idx="2">
+            <a:schemeClr val="accent1">
+              <a:shade val="50000"/>
+            </a:schemeClr>
+          </a:lnRef>
+          <a:fillRef idx="1">
+            <a:schemeClr val="accent1"/>
+          </a:fillRef>
+          <a:effectRef idx="0">
+            <a:schemeClr val="accent1"/>
+          </a:effectRef>
+          <a:fontRef idx="minor">
+            <a:schemeClr val="lt1"/>
+          </a:fontRef>
+        </p:style>
+        <p:txBody>
+          <a:bodyPr rtlCol="0" anchor="ctr"/>
+          <a:lstStyle/>
+          <a:p>
+            <a:pPr algn="ctr"/>
+            <a:r>
+              <a:rPr lang="en-US" sz="1400" dirty="0">
+                <a:solidFill>
+                  <a:schemeClr val="tx1"/>
+                </a:solidFill>
+              </a:rPr>
+              <a:t>EDUAI23|FIN130,MTS-DI,PD,PP</a:t>
+            </a:r>
+          </a:p>
+        </p:txBody>
+      </p:sp>
+      <p:sp>
+        <p:nvSpPr>
+          <p:cNvPr id="15" name="Rectangle 14">
+            <a:extLst>
+              <a:ext uri="{FF2B5EF4-FFF2-40B4-BE49-F238E27FC236}">
+                <a16:creationId xmlns:a16="http://schemas.microsoft.com/office/drawing/2014/main" id="{E25ADD1B-1D87-39EF-7DC2-314BA877E725}"/>
+              </a:ext>
+            </a:extLst>
+          </p:cNvPr>
+          <p:cNvSpPr/>
+          <p:nvPr/>
+        </p:nvSpPr>
+        <p:spPr>
+          <a:xfrm>
+            <a:off x="6334968" y="3825740"/>
+            <a:ext cx="2520000" cy="360000"/>
+          </a:xfrm>
+          <a:prstGeom prst="rect">
+            <a:avLst/>
+          </a:prstGeom>
+          <a:noFill/>
+          <a:ln>
+            <a:solidFill>
+              <a:schemeClr val="tx1"/>
+            </a:solidFill>
+          </a:ln>
+        </p:spPr>
+        <p:style>
+          <a:lnRef idx="2">
+            <a:schemeClr val="accent1">
+              <a:shade val="50000"/>
+            </a:schemeClr>
+          </a:lnRef>
+          <a:fillRef idx="1">
+            <a:schemeClr val="accent1"/>
+          </a:fillRef>
+          <a:effectRef idx="0">
+            <a:schemeClr val="accent1"/>
+          </a:effectRef>
+          <a:fontRef idx="minor">
+            <a:schemeClr val="lt1"/>
+          </a:fontRef>
+        </p:style>
+        <p:txBody>
+          <a:bodyPr rtlCol="0" anchor="ctr"/>
+          <a:lstStyle/>
+          <a:p>
+            <a:pPr algn="ctr"/>
+            <a:r>
+              <a:rPr lang="en-US" dirty="0">
+                <a:solidFill>
+                  <a:schemeClr val="tx1"/>
+                </a:solidFill>
+              </a:rPr>
+              <a:t>EDUAI23|RAW20,PD</a:t>
+            </a:r>
+          </a:p>
+        </p:txBody>
+      </p:sp>
+      <p:sp>
+        <p:nvSpPr>
+          <p:cNvPr id="16" name="Rectangle 15">
+            <a:extLst>
+              <a:ext uri="{FF2B5EF4-FFF2-40B4-BE49-F238E27FC236}">
+                <a16:creationId xmlns:a16="http://schemas.microsoft.com/office/drawing/2014/main" id="{C8E3E49F-EE6A-702A-E355-11800234C35D}"/>
+              </a:ext>
+            </a:extLst>
+          </p:cNvPr>
+          <p:cNvSpPr/>
+          <p:nvPr/>
+        </p:nvSpPr>
+        <p:spPr>
+          <a:xfrm>
+            <a:off x="3337033" y="5339202"/>
+            <a:ext cx="2520000" cy="360000"/>
+          </a:xfrm>
+          <a:prstGeom prst="rect">
+            <a:avLst/>
+          </a:prstGeom>
+          <a:noFill/>
+          <a:ln>
+            <a:solidFill>
+              <a:schemeClr val="tx1"/>
+            </a:solidFill>
+          </a:ln>
+        </p:spPr>
+        <p:style>
+          <a:lnRef idx="2">
+            <a:schemeClr val="accent1">
+              <a:shade val="50000"/>
+            </a:schemeClr>
+          </a:lnRef>
+          <a:fillRef idx="1">
+            <a:schemeClr val="accent1"/>
+          </a:fillRef>
+          <a:effectRef idx="0">
+            <a:schemeClr val="accent1"/>
+          </a:effectRef>
+          <a:fontRef idx="minor">
+            <a:schemeClr val="lt1"/>
+          </a:fontRef>
+        </p:style>
+        <p:txBody>
+          <a:bodyPr rtlCol="0" anchor="ctr"/>
+          <a:lstStyle/>
+          <a:p>
+            <a:pPr algn="ctr"/>
+            <a:r>
+              <a:rPr lang="en-US" sz="1400" dirty="0">
+                <a:solidFill>
+                  <a:schemeClr val="tx1"/>
+                </a:solidFill>
+              </a:rPr>
+              <a:t>EDUAI23|RAW124,VB,</a:t>
+            </a:r>
+          </a:p>
+          <a:p>
+            <a:pPr algn="ctr"/>
+            <a:r>
+              <a:rPr lang="en-US" sz="1400" dirty="0" err="1">
+                <a:solidFill>
+                  <a:schemeClr val="tx1"/>
+                </a:solidFill>
+              </a:rPr>
+              <a:t>Consumption,FixedBin</a:t>
+            </a:r>
+            <a:endParaRPr lang="en-US" sz="1400" dirty="0">
+              <a:solidFill>
+                <a:schemeClr val="tx1"/>
+              </a:solidFill>
+            </a:endParaRPr>
+          </a:p>
+        </p:txBody>
+      </p:sp>
+      <p:sp>
+        <p:nvSpPr>
+          <p:cNvPr id="17" name="Rectangle 16">
+            <a:extLst>
+              <a:ext uri="{FF2B5EF4-FFF2-40B4-BE49-F238E27FC236}">
+                <a16:creationId xmlns:a16="http://schemas.microsoft.com/office/drawing/2014/main" id="{B0666EC5-C999-74A1-B771-B826AB784A57}"/>
+              </a:ext>
+            </a:extLst>
+          </p:cNvPr>
+          <p:cNvSpPr/>
+          <p:nvPr/>
+        </p:nvSpPr>
+        <p:spPr>
+          <a:xfrm>
+            <a:off x="4597033" y="4194915"/>
+            <a:ext cx="36000" cy="360000"/>
+          </a:xfrm>
+          <a:prstGeom prst="rect">
+            <a:avLst/>
+          </a:prstGeom>
+          <a:solidFill>
+            <a:srgbClr val="FF0000"/>
+          </a:solidFill>
+          <a:ln>
+            <a:noFill/>
+          </a:ln>
+        </p:spPr>
+        <p:style>
+          <a:lnRef idx="2">
+            <a:schemeClr val="accent1">
+              <a:shade val="50000"/>
+            </a:schemeClr>
+          </a:lnRef>
+          <a:fillRef idx="1">
+            <a:schemeClr val="accent1"/>
+          </a:fillRef>
+          <a:effectRef idx="0">
+            <a:schemeClr val="accent1"/>
+          </a:effectRef>
+          <a:fontRef idx="minor">
+            <a:schemeClr val="lt1"/>
+          </a:fontRef>
+        </p:style>
+        <p:txBody>
+          <a:bodyPr rtlCol="0" anchor="ctr"/>
+          <a:lstStyle/>
+          <a:p>
+            <a:pPr algn="ctr"/>
+            <a:endParaRPr lang="en-US"/>
+          </a:p>
+        </p:txBody>
+      </p:sp>
+      <p:sp>
+        <p:nvSpPr>
+          <p:cNvPr id="18" name="Rectangle 17">
+            <a:extLst>
+              <a:ext uri="{FF2B5EF4-FFF2-40B4-BE49-F238E27FC236}">
+                <a16:creationId xmlns:a16="http://schemas.microsoft.com/office/drawing/2014/main" id="{5BD14E5B-5E85-5A5A-766B-E03F318503DD}"/>
+              </a:ext>
+            </a:extLst>
+          </p:cNvPr>
+          <p:cNvSpPr/>
+          <p:nvPr/>
+        </p:nvSpPr>
+        <p:spPr>
+          <a:xfrm>
+            <a:off x="4616025" y="2889000"/>
+            <a:ext cx="36000" cy="180000"/>
+          </a:xfrm>
+          <a:prstGeom prst="rect">
+            <a:avLst/>
+          </a:prstGeom>
+          <a:solidFill>
+            <a:srgbClr val="FF0000"/>
+          </a:solidFill>
+          <a:ln>
+            <a:noFill/>
+          </a:ln>
+        </p:spPr>
+        <p:style>
+          <a:lnRef idx="2">
+            <a:schemeClr val="accent1">
+              <a:shade val="50000"/>
+            </a:schemeClr>
+          </a:lnRef>
+          <a:fillRef idx="1">
+            <a:schemeClr val="accent1"/>
+          </a:fillRef>
+          <a:effectRef idx="0">
+            <a:schemeClr val="accent1"/>
+          </a:effectRef>
+          <a:fontRef idx="minor">
+            <a:schemeClr val="lt1"/>
+          </a:fontRef>
+        </p:style>
+        <p:txBody>
+          <a:bodyPr rtlCol="0" anchor="ctr"/>
+          <a:lstStyle/>
+          <a:p>
+            <a:pPr algn="ctr"/>
+            <a:endParaRPr lang="en-US"/>
+          </a:p>
+        </p:txBody>
+      </p:sp>
+      <p:sp>
+        <p:nvSpPr>
+          <p:cNvPr id="19" name="Rectangle 18">
+            <a:extLst>
+              <a:ext uri="{FF2B5EF4-FFF2-40B4-BE49-F238E27FC236}">
+                <a16:creationId xmlns:a16="http://schemas.microsoft.com/office/drawing/2014/main" id="{895948E5-4E31-3922-C8CF-4B512D7E3A94}"/>
+              </a:ext>
+            </a:extLst>
+          </p:cNvPr>
+          <p:cNvSpPr/>
+          <p:nvPr/>
+        </p:nvSpPr>
+        <p:spPr>
+          <a:xfrm>
+            <a:off x="7594968" y="2889000"/>
+            <a:ext cx="36000" cy="180000"/>
+          </a:xfrm>
+          <a:prstGeom prst="rect">
+            <a:avLst/>
+          </a:prstGeom>
+          <a:solidFill>
+            <a:srgbClr val="FF0000"/>
+          </a:solidFill>
+          <a:ln>
+            <a:noFill/>
+          </a:ln>
+        </p:spPr>
+        <p:style>
+          <a:lnRef idx="2">
+            <a:schemeClr val="accent1">
+              <a:shade val="50000"/>
+            </a:schemeClr>
+          </a:lnRef>
+          <a:fillRef idx="1">
+            <a:schemeClr val="accent1"/>
+          </a:fillRef>
+          <a:effectRef idx="0">
+            <a:schemeClr val="accent1"/>
+          </a:effectRef>
+          <a:fontRef idx="minor">
+            <a:schemeClr val="lt1"/>
+          </a:fontRef>
+        </p:style>
+        <p:txBody>
+          <a:bodyPr rtlCol="0" anchor="ctr"/>
+          <a:lstStyle/>
+          <a:p>
+            <a:pPr algn="ctr"/>
+            <a:endParaRPr lang="en-US"/>
+          </a:p>
+        </p:txBody>
+      </p:sp>
+      <p:sp>
+        <p:nvSpPr>
+          <p:cNvPr id="20" name="Rectangle 19">
+            <a:extLst>
+              <a:ext uri="{FF2B5EF4-FFF2-40B4-BE49-F238E27FC236}">
+                <a16:creationId xmlns:a16="http://schemas.microsoft.com/office/drawing/2014/main" id="{19F5264B-C850-9A6F-6100-29865C5669E2}"/>
+              </a:ext>
+            </a:extLst>
+          </p:cNvPr>
+          <p:cNvSpPr/>
+          <p:nvPr/>
+        </p:nvSpPr>
+        <p:spPr>
+          <a:xfrm>
+            <a:off x="6078000" y="2690633"/>
+            <a:ext cx="36000" cy="180000"/>
+          </a:xfrm>
+          <a:prstGeom prst="rect">
+            <a:avLst/>
+          </a:prstGeom>
+          <a:solidFill>
+            <a:srgbClr val="FF0000"/>
+          </a:solidFill>
+          <a:ln>
+            <a:noFill/>
+          </a:ln>
+        </p:spPr>
+        <p:style>
+          <a:lnRef idx="2">
+            <a:schemeClr val="accent1">
+              <a:shade val="50000"/>
+            </a:schemeClr>
+          </a:lnRef>
+          <a:fillRef idx="1">
+            <a:schemeClr val="accent1"/>
+          </a:fillRef>
+          <a:effectRef idx="0">
+            <a:schemeClr val="accent1"/>
+          </a:effectRef>
+          <a:fontRef idx="minor">
+            <a:schemeClr val="lt1"/>
+          </a:fontRef>
+        </p:style>
+        <p:txBody>
+          <a:bodyPr rtlCol="0" anchor="ctr"/>
+          <a:lstStyle/>
+          <a:p>
+            <a:pPr algn="ctr"/>
+            <a:endParaRPr lang="en-US"/>
+          </a:p>
+        </p:txBody>
+      </p:sp>
+      <p:sp>
+        <p:nvSpPr>
+          <p:cNvPr id="21" name="Rectangle 20">
+            <a:extLst>
+              <a:ext uri="{FF2B5EF4-FFF2-40B4-BE49-F238E27FC236}">
+                <a16:creationId xmlns:a16="http://schemas.microsoft.com/office/drawing/2014/main" id="{3E73882F-65E5-DA96-12AE-D0767EFB8990}"/>
+              </a:ext>
+            </a:extLst>
+          </p:cNvPr>
+          <p:cNvSpPr/>
+          <p:nvPr/>
+        </p:nvSpPr>
+        <p:spPr>
+          <a:xfrm>
+            <a:off x="4584000" y="2850915"/>
+            <a:ext cx="3060000" cy="36000"/>
+          </a:xfrm>
+          <a:prstGeom prst="rect">
+            <a:avLst/>
+          </a:prstGeom>
+          <a:solidFill>
+            <a:srgbClr val="FF0000"/>
+          </a:solidFill>
+          <a:ln>
+            <a:noFill/>
+          </a:ln>
+        </p:spPr>
+        <p:style>
+          <a:lnRef idx="2">
+            <a:schemeClr val="accent1">
+              <a:shade val="50000"/>
+            </a:schemeClr>
+          </a:lnRef>
+          <a:fillRef idx="1">
+            <a:schemeClr val="accent1"/>
+          </a:fillRef>
+          <a:effectRef idx="0">
+            <a:schemeClr val="accent1"/>
+          </a:effectRef>
+          <a:fontRef idx="minor">
+            <a:schemeClr val="lt1"/>
+          </a:fontRef>
+        </p:style>
+        <p:txBody>
+          <a:bodyPr rtlCol="0" anchor="ctr"/>
+          <a:lstStyle/>
+          <a:p>
+            <a:pPr algn="ctr"/>
+            <a:endParaRPr lang="en-US"/>
+          </a:p>
+        </p:txBody>
+      </p:sp>
+    </p:spTree>
+    <p:extLst>
+      <p:ext uri="{BB962C8B-B14F-4D97-AF65-F5344CB8AC3E}">
+        <p14:creationId xmlns:p14="http://schemas.microsoft.com/office/powerpoint/2010/main" val="1978841916"/>
+      </p:ext>
+    </p:extLst>
+  </p:cSld>
+  <p:clrMapOvr>
+    <a:masterClrMapping/>
+  </p:clrMapOvr>
+</p:sld>
+</file>
+
 <file path=ppt/theme/theme1.xml><?xml version="1.0" encoding="utf-8"?>
 <a:theme xmlns:a="http://schemas.openxmlformats.org/drawingml/2006/main" name="Office Theme">
   <a:themeElements>
